--- a/research/rag/contextual-retrieval.pptx
+++ b/research/rag/contextual-retrieval.pptx
@@ -4,12 +4,12 @@
   <p:sldMasterIdLst>
     <p:sldMasterId id="2147483648" r:id="rId1"/>
   </p:sldMasterIdLst>
+  <p:sldIdLst>
+    <p:sldId id="256" r:id="rId2"/>
+  </p:sldIdLst>
   <p:notesMasterIdLst>
     <p:notesMasterId r:id="rId3"/>
   </p:notesMasterIdLst>
-  <p:sldIdLst>
-    <p:sldId id="256" r:id="rId2"/>
-  </p:sldIdLst>
   <p:sldSz cx="14630400" cy="8229600"/>
   <p:notesSz cx="8229600" cy="14630400"/>
   <p:defaultTextStyle>
@@ -104,11 +104,6 @@
       </a:defRPr>
     </a:lvl9pPr>
   </p:defaultTextStyle>
-  <p:extLst>
-    <p:ext uri="{EFAFB233-063F-42B5-8137-9DF3F51BA10A}">
-      <p15:sldGuideLst xmlns:p15="http://schemas.microsoft.com/office/powerpoint/2012/main"/>
-    </p:ext>
-  </p:extLst>
 </p:presentation>
 </file>
 
@@ -134,16 +129,240 @@
           <a:chExt cx="0" cy="0"/>
         </a:xfrm>
       </p:grpSpPr>
+      <p:sp>
+        <p:nvSpPr>
+          <p:cNvPr id="2" name="Header Placeholder 1"/>
+          <p:cNvSpPr>
+            <a:spLocks noGrp="1"/>
+          </p:cNvSpPr>
+          <p:nvPr>
+            <p:ph type="hdr" sz="quarter"/>
+          </p:nvPr>
+        </p:nvSpPr>
+        <p:spPr>
+          <a:xfrm>
+            <a:off x="0" y="0"/>
+            <a:ext cx="2971800" cy="458788"/>
+          </a:xfrm>
+          <a:prstGeom prst="rect">
+            <a:avLst/>
+          </a:prstGeom>
+        </p:spPr>
+        <p:txBody>
+          <a:bodyPr vert="horz" lIns="91440" tIns="45720" rIns="91440" bIns="45720" rtlCol="0"/>
+          <a:lstStyle>
+            <a:lvl1pPr algn="l">
+              <a:defRPr sz="1200"/>
+            </a:lvl1pPr>
+          </a:lstStyle>
+          <a:p>
+            <a:endParaRPr lang="en-US"/>
+          </a:p>
+        </p:txBody>
+      </p:sp>
+      <p:sp>
+        <p:nvSpPr>
+          <p:cNvPr id="3" name="Date Placeholder 2"/>
+          <p:cNvSpPr>
+            <a:spLocks noGrp="1"/>
+          </p:cNvSpPr>
+          <p:nvPr>
+            <p:ph type="dt" idx="1"/>
+          </p:nvPr>
+        </p:nvSpPr>
+        <p:spPr>
+          <a:xfrm>
+            <a:off x="3884613" y="0"/>
+            <a:ext cx="2971800" cy="458788"/>
+          </a:xfrm>
+          <a:prstGeom prst="rect">
+            <a:avLst/>
+          </a:prstGeom>
+        </p:spPr>
+        <p:txBody>
+          <a:bodyPr vert="horz" lIns="91440" tIns="45720" rIns="91440" bIns="45720" rtlCol="0"/>
+          <a:lstStyle>
+            <a:lvl1pPr algn="r">
+              <a:defRPr sz="1200"/>
+            </a:lvl1pPr>
+          </a:lstStyle>
+          <a:p>
+            <a:fld id="{5282F153-3F37-0F45-9E97-73ACFA13230C}" type="datetimeFigureOut">
+              <a:rPr lang="en-US"/>
+              <a:t>7/23/19</a:t>
+            </a:fld>
+            <a:endParaRPr lang="en-US"/>
+          </a:p>
+        </p:txBody>
+      </p:sp>
+      <p:sp>
+        <p:nvSpPr>
+          <p:cNvPr id="4" name="Slide Image Placeholder 3"/>
+          <p:cNvSpPr>
+            <a:spLocks noGrp="1" noRot="1" noChangeAspect="1"/>
+          </p:cNvSpPr>
+          <p:nvPr>
+            <p:ph type="sldImg" idx="2"/>
+          </p:nvPr>
+        </p:nvSpPr>
+        <p:spPr>
+          <a:xfrm>
+            <a:off x="685800" y="1143000"/>
+            <a:ext cx="5486400" cy="3086100"/>
+          </a:xfrm>
+          <a:prstGeom prst="rect">
+            <a:avLst/>
+          </a:prstGeom>
+          <a:noFill/>
+          <a:ln w="12700">
+            <a:solidFill>
+              <a:prstClr val="black"/>
+            </a:solidFill>
+          </a:ln>
+        </p:spPr>
+        <p:txBody>
+          <a:bodyPr vert="horz" lIns="91440" tIns="45720" rIns="91440" bIns="45720" rtlCol="0" anchor="ctr"/>
+          <a:lstStyle/>
+          <a:p>
+            <a:endParaRPr lang="en-US"/>
+          </a:p>
+        </p:txBody>
+      </p:sp>
+      <p:sp>
+        <p:nvSpPr>
+          <p:cNvPr id="5" name="Notes Placeholder 4"/>
+          <p:cNvSpPr>
+            <a:spLocks noGrp="1"/>
+          </p:cNvSpPr>
+          <p:nvPr>
+            <p:ph type="body" sz="quarter" idx="3"/>
+          </p:nvPr>
+        </p:nvSpPr>
+        <p:spPr>
+          <a:xfrm>
+            <a:off x="685800" y="4400550"/>
+            <a:ext cx="5486400" cy="3600450"/>
+          </a:xfrm>
+          <a:prstGeom prst="rect">
+            <a:avLst/>
+          </a:prstGeom>
+        </p:spPr>
+        <p:txBody>
+          <a:bodyPr vert="horz" lIns="91440" tIns="45720" rIns="91440" bIns="45720" rtlCol="0"/>
+          <a:lstStyle/>
+          <a:p>
+            <a:pPr lvl="0"/>
+            <a:r>
+              <a:rPr lang="en-US"/>
+              <a:t>Click to edit Master text styles</a:t>
+            </a:r>
+          </a:p>
+          <a:p>
+            <a:pPr lvl="1"/>
+            <a:r>
+              <a:rPr lang="en-US"/>
+              <a:t>Second level</a:t>
+            </a:r>
+          </a:p>
+          <a:p>
+            <a:pPr lvl="2"/>
+            <a:r>
+              <a:rPr lang="en-US"/>
+              <a:t>Third level</a:t>
+            </a:r>
+          </a:p>
+          <a:p>
+            <a:pPr lvl="3"/>
+            <a:r>
+              <a:rPr lang="en-US"/>
+              <a:t>Fourth level</a:t>
+            </a:r>
+          </a:p>
+          <a:p>
+            <a:pPr lvl="4"/>
+            <a:r>
+              <a:rPr lang="en-US"/>
+              <a:t>Fifth level</a:t>
+            </a:r>
+          </a:p>
+        </p:txBody>
+      </p:sp>
+      <p:sp>
+        <p:nvSpPr>
+          <p:cNvPr id="6" name="Footer Placeholder 5"/>
+          <p:cNvSpPr>
+            <a:spLocks noGrp="1"/>
+          </p:cNvSpPr>
+          <p:nvPr>
+            <p:ph type="ftr" sz="quarter" idx="4"/>
+          </p:nvPr>
+        </p:nvSpPr>
+        <p:spPr>
+          <a:xfrm>
+            <a:off x="0" y="8685213"/>
+            <a:ext cx="2971800" cy="458787"/>
+          </a:xfrm>
+          <a:prstGeom prst="rect">
+            <a:avLst/>
+          </a:prstGeom>
+        </p:spPr>
+        <p:txBody>
+          <a:bodyPr vert="horz" lIns="91440" tIns="45720" rIns="91440" bIns="45720" rtlCol="0" anchor="b"/>
+          <a:lstStyle>
+            <a:lvl1pPr algn="l">
+              <a:defRPr sz="1200"/>
+            </a:lvl1pPr>
+          </a:lstStyle>
+          <a:p>
+            <a:endParaRPr lang="en-US"/>
+          </a:p>
+        </p:txBody>
+      </p:sp>
+      <p:sp>
+        <p:nvSpPr>
+          <p:cNvPr id="7" name="Slide Number Placeholder 6"/>
+          <p:cNvSpPr>
+            <a:spLocks noGrp="1"/>
+          </p:cNvSpPr>
+          <p:nvPr>
+            <p:ph type="sldNum" sz="quarter" idx="5"/>
+          </p:nvPr>
+        </p:nvSpPr>
+        <p:spPr>
+          <a:xfrm>
+            <a:off x="3884613" y="8685213"/>
+            <a:ext cx="2971800" cy="458787"/>
+          </a:xfrm>
+          <a:prstGeom prst="rect">
+            <a:avLst/>
+          </a:prstGeom>
+        </p:spPr>
+        <p:txBody>
+          <a:bodyPr vert="horz" lIns="91440" tIns="45720" rIns="91440" bIns="45720" rtlCol="0" anchor="b"/>
+          <a:lstStyle>
+            <a:lvl1pPr algn="r">
+              <a:defRPr sz="1200"/>
+            </a:lvl1pPr>
+          </a:lstStyle>
+          <a:p>
+            <a:fld id="{CE5E9CC1-C706-0F49-92D6-E571CC5EEA8F}" type="slidenum">
+              <a:rPr lang="en-US"/>
+              <a:t>‹#›</a:t>
+            </a:fld>
+            <a:endParaRPr lang="en-US"/>
+          </a:p>
+        </p:txBody>
+      </p:sp>
     </p:spTree>
     <p:extLst>
       <p:ext uri="{BB962C8B-B14F-4D97-AF65-F5344CB8AC3E}">
-        <p14:creationId xmlns:p14="http://schemas.microsoft.com/office/powerpoint/2010/main" val="3740914309"/>
+        <p14:creationId xmlns:p14="http://schemas.microsoft.com/office/powerpoint/2010/main" val="1024086991"/>
       </p:ext>
     </p:extLst>
   </p:cSld>
   <p:clrMap bg1="lt1" tx1="dk1" bg2="lt2" tx2="dk2" accent1="accent1" accent2="accent2" accent3="accent3" accent4="accent4" accent5="accent5" accent6="accent6" hlink="hlink" folHlink="folHlink"/>
   <p:notesStyle>
-    <a:lvl1pPr marL="0" algn="l" defTabSz="914400" rtl="0" eaLnBrk="1" latinLnBrk="1" hangingPunct="1">
+    <a:lvl1pPr marL="0" algn="l" defTabSz="914400" rtl="0" eaLnBrk="1" latinLnBrk="0" hangingPunct="1">
       <a:defRPr sz="1200" kern="1200">
         <a:solidFill>
           <a:schemeClr val="tx1"/>
@@ -153,7 +372,7 @@
         <a:cs typeface="+mn-cs"/>
       </a:defRPr>
     </a:lvl1pPr>
-    <a:lvl2pPr marL="457200" algn="l" defTabSz="914400" rtl="0" eaLnBrk="1" latinLnBrk="1" hangingPunct="1">
+    <a:lvl2pPr marL="457200" algn="l" defTabSz="914400" rtl="0" eaLnBrk="1" latinLnBrk="0" hangingPunct="1">
       <a:defRPr sz="1200" kern="1200">
         <a:solidFill>
           <a:schemeClr val="tx1"/>
@@ -163,7 +382,7 @@
         <a:cs typeface="+mn-cs"/>
       </a:defRPr>
     </a:lvl2pPr>
-    <a:lvl3pPr marL="914400" algn="l" defTabSz="914400" rtl="0" eaLnBrk="1" latinLnBrk="1" hangingPunct="1">
+    <a:lvl3pPr marL="914400" algn="l" defTabSz="914400" rtl="0" eaLnBrk="1" latinLnBrk="0" hangingPunct="1">
       <a:defRPr sz="1200" kern="1200">
         <a:solidFill>
           <a:schemeClr val="tx1"/>
@@ -173,7 +392,7 @@
         <a:cs typeface="+mn-cs"/>
       </a:defRPr>
     </a:lvl3pPr>
-    <a:lvl4pPr marL="1371600" algn="l" defTabSz="914400" rtl="0" eaLnBrk="1" latinLnBrk="1" hangingPunct="1">
+    <a:lvl4pPr marL="1371600" algn="l" defTabSz="914400" rtl="0" eaLnBrk="1" latinLnBrk="0" hangingPunct="1">
       <a:defRPr sz="1200" kern="1200">
         <a:solidFill>
           <a:schemeClr val="tx1"/>
@@ -183,7 +402,7 @@
         <a:cs typeface="+mn-cs"/>
       </a:defRPr>
     </a:lvl4pPr>
-    <a:lvl5pPr marL="1828800" algn="l" defTabSz="914400" rtl="0" eaLnBrk="1" latinLnBrk="1" hangingPunct="1">
+    <a:lvl5pPr marL="1828800" algn="l" defTabSz="914400" rtl="0" eaLnBrk="1" latinLnBrk="0" hangingPunct="1">
       <a:defRPr sz="1200" kern="1200">
         <a:solidFill>
           <a:schemeClr val="tx1"/>
@@ -193,7 +412,7 @@
         <a:cs typeface="+mn-cs"/>
       </a:defRPr>
     </a:lvl5pPr>
-    <a:lvl6pPr marL="2286000" algn="l" defTabSz="914400" rtl="0" eaLnBrk="1" latinLnBrk="1" hangingPunct="1">
+    <a:lvl6pPr marL="2286000" algn="l" defTabSz="914400" rtl="0" eaLnBrk="1" latinLnBrk="0" hangingPunct="1">
       <a:defRPr sz="1200" kern="1200">
         <a:solidFill>
           <a:schemeClr val="tx1"/>
@@ -203,7 +422,7 @@
         <a:cs typeface="+mn-cs"/>
       </a:defRPr>
     </a:lvl6pPr>
-    <a:lvl7pPr marL="2743200" algn="l" defTabSz="914400" rtl="0" eaLnBrk="1" latinLnBrk="1" hangingPunct="1">
+    <a:lvl7pPr marL="2743200" algn="l" defTabSz="914400" rtl="0" eaLnBrk="1" latinLnBrk="0" hangingPunct="1">
       <a:defRPr sz="1200" kern="1200">
         <a:solidFill>
           <a:schemeClr val="tx1"/>
@@ -213,7 +432,7 @@
         <a:cs typeface="+mn-cs"/>
       </a:defRPr>
     </a:lvl7pPr>
-    <a:lvl8pPr marL="3200400" algn="l" defTabSz="914400" rtl="0" eaLnBrk="1" latinLnBrk="1" hangingPunct="1">
+    <a:lvl8pPr marL="3200400" algn="l" defTabSz="914400" rtl="0" eaLnBrk="1" latinLnBrk="0" hangingPunct="1">
       <a:defRPr sz="1200" kern="1200">
         <a:solidFill>
           <a:schemeClr val="tx1"/>
@@ -223,7 +442,7 @@
         <a:cs typeface="+mn-cs"/>
       </a:defRPr>
     </a:lvl8pPr>
-    <a:lvl9pPr marL="3657600" algn="l" defTabSz="914400" rtl="0" eaLnBrk="1" latinLnBrk="1" hangingPunct="1">
+    <a:lvl9pPr marL="3657600" algn="l" defTabSz="914400" rtl="0" eaLnBrk="1" latinLnBrk="0" hangingPunct="1">
       <a:defRPr sz="1200" kern="1200">
         <a:solidFill>
           <a:schemeClr val="tx1"/>
@@ -294,6 +513,7 @@
 Late Chunking과의 차이: Late Chunking은 LLM 없이 임베딩 모델 안에서 문맥을 반영하므로 싸지만 글을 바꾸지 않아 BM25는 좋아지지 않고, 토큰별 벡터를 주는 모델이 필요합니다. Contextual Retrieval은 글 자체에 문맥을 써 넣어 임베딩과 BM25가 함께 좋아지고 임베딩 모델 제약이 없지만 LLM 호출 비용이 듭니다.
 상세 문서: https://github.com/unicorn-campus/hybrid-ai/blob/main/research/rag/contextual-retrieval.md</a:t>
             </a:r>
+            <a:endParaRPr lang="en-US" dirty="0"/>
           </a:p>
         </p:txBody>
       </p:sp>
@@ -371,7 +591,6 @@
         <a:solidFill>
           <a:srgbClr val="FFFFFF"/>
         </a:solidFill>
-        <a:effectLst/>
       </p:bgPr>
     </p:bg>
     <p:spTree>
@@ -410,13 +629,6 @@
             <a:prstDash val="solid"/>
           </a:ln>
         </p:spPr>
-        <p:txBody>
-          <a:bodyPr/>
-          <a:lstStyle/>
-          <a:p>
-            <a:endParaRPr lang="ko-KR" altLang="en-US"/>
-          </a:p>
-        </p:txBody>
       </p:sp>
       <p:sp>
         <p:nvSpPr>
@@ -439,7 +651,7 @@
           <a:bodyPr wrap="square" lIns="0" tIns="0" rIns="0" bIns="0" rtlCol="0" anchor="ctr"/>
           <a:lstStyle/>
           <a:p>
-            <a:pPr marL="0" indent="0">
+            <a:pPr indent="0" marL="0">
               <a:buNone/>
             </a:pPr>
             <a:r>
@@ -460,9 +672,7 @@
       <p:sp>
         <p:nvSpPr>
           <p:cNvPr id="4" name="Text 2"/>
-          <p:cNvSpPr>
-            <a:spLocks noGrp="1"/>
-          </p:cNvSpPr>
+          <p:cNvSpPr/>
           <p:nvPr>
             <p:ph type="title"/>
           </p:nvPr>
@@ -481,7 +691,7 @@
         <p:txBody>
           <a:bodyPr wrap="square" rtlCol="0"/>
           <a:lstStyle>
-            <a:lvl1pPr marL="0" indent="0" algn="l">
+            <a:lvl1pPr algn="l" indent="0" marL="0">
               <a:buNone/>
               <a:defRPr lang="en-US" sz="3200" b="1" dirty="0">
                 <a:solidFill>
@@ -494,7 +704,7 @@
             </a:lvl1pPr>
           </a:lstStyle>
           <a:p>
-            <a:pPr marL="0" indent="0" algn="l">
+            <a:pPr algn="l" indent="0" marL="0">
               <a:buNone/>
             </a:pPr>
             <a:endParaRPr lang="en-US" sz="3200" dirty="0"/>
@@ -521,7 +731,7 @@
           </a:prstGeom>
           <a:extLst>
             <a:ext uri="{C572A759-6A51-4108-AA02-DFA0A04FC94B}">
-              <ma14:wrappingTextBoxFlag xmlns:ma14="http://schemas.microsoft.com/office/mac/drawingml/2011/main" xmlns="" val="0"/>
+              <ma14:wrappingTextBoxFlag xmlns:ma14="http://schemas.microsoft.com/office/mac/drawingml/2011/main" val="0"/>
             </a:ext>
           </a:extLst>
         </p:spPr>
@@ -542,8 +752,8 @@
           <a:p>
             <a:pPr algn="r"/>
             <a:fld id="{F7021451-1387-4CA6-816F-3879F97B5CBC}" type="slidenum">
-              <a:rPr lang="en-US" b="0"/>
-              <a:t>‹#›</a:t>
+              <a:rPr b="0" lang="en-US"/>
+              <a:t>1002</a:t>
             </a:fld>
             <a:endParaRPr lang="en-US"/>
           </a:p>
@@ -560,11 +770,6 @@
 <file path=ppt/slideMasters/slideMaster1.xml><?xml version="1.0" encoding="utf-8"?>
 <p:sldMaster xmlns:a="http://schemas.openxmlformats.org/drawingml/2006/main" xmlns:r="http://schemas.openxmlformats.org/officeDocument/2006/relationships" xmlns:p="http://schemas.openxmlformats.org/presentationml/2006/main">
   <p:cSld>
-    <p:bg>
-      <p:bgRef idx="1001">
-        <a:schemeClr val="bg1"/>
-      </p:bgRef>
-    </p:bg>
     <p:spTree>
       <p:nvGrpSpPr>
         <p:cNvPr id="1" name=""/>
@@ -599,7 +804,7 @@
           </a:prstGeom>
           <a:extLst>
             <a:ext uri="{C572A759-6A51-4108-AA02-DFA0A04FC94B}">
-              <ma14:wrappingTextBoxFlag xmlns:ma14="http://schemas.microsoft.com/office/mac/drawingml/2011/main" xmlns="" val="0"/>
+              <ma14:wrappingTextBoxFlag xmlns:ma14="http://schemas.microsoft.com/office/mac/drawingml/2011/main" val="0"/>
             </a:ext>
           </a:extLst>
         </p:spPr>
@@ -620,8 +825,8 @@
           <a:p>
             <a:pPr algn="r"/>
             <a:fld id="{F7021451-1387-4CA6-816F-3879F97B5CBC}" type="slidenum">
-              <a:rPr lang="en-US" b="0"/>
-              <a:t>‹#›</a:t>
+              <a:rPr b="0" lang="en-US"/>
+              <a:t>null</a:t>
             </a:fld>
             <a:endParaRPr lang="en-US"/>
           </a:p>
@@ -908,9 +1113,7 @@
       <p:sp>
         <p:nvSpPr>
           <p:cNvPr id="2" name="Text 2"/>
-          <p:cNvSpPr>
-            <a:spLocks noGrp="1"/>
-          </p:cNvSpPr>
+          <p:cNvSpPr/>
           <p:nvPr>
             <p:ph type="title"/>
           </p:nvPr>
@@ -930,31 +1133,9 @@
           <a:bodyPr wrap="square" lIns="0" tIns="0" rIns="0" bIns="0" rtlCol="0" anchor="ctr"/>
           <a:lstStyle/>
           <a:p>
-            <a:pPr marL="0" indent="0" algn="l">
+            <a:pPr algn="l" indent="0" marL="0">
               <a:buNone/>
             </a:pPr>
-            <a:r>
-              <a:rPr lang="ko-KR" altLang="en-US" sz="3200" b="1" dirty="0">
-                <a:solidFill>
-                  <a:srgbClr val="2C2926"/>
-                </a:solidFill>
-                <a:latin typeface="Pretendard" pitchFamily="34" charset="0"/>
-                <a:ea typeface="Pretendard" pitchFamily="34" charset="-122"/>
-                <a:cs typeface="Pretendard" pitchFamily="34" charset="-120"/>
-              </a:rPr>
-              <a:t>새로운 기법 소개</a:t>
-            </a:r>
-            <a:r>
-              <a:rPr lang="en-US" altLang="ko-KR" sz="3200" b="1" dirty="0">
-                <a:solidFill>
-                  <a:srgbClr val="2C2926"/>
-                </a:solidFill>
-                <a:latin typeface="Pretendard" pitchFamily="34" charset="0"/>
-                <a:ea typeface="Pretendard" pitchFamily="34" charset="-122"/>
-                <a:cs typeface="Pretendard" pitchFamily="34" charset="-120"/>
-              </a:rPr>
-              <a:t>: </a:t>
-            </a:r>
             <a:r>
               <a:rPr lang="en-US" sz="3200" b="1" dirty="0">
                 <a:solidFill>
@@ -964,29 +1145,7 @@
                 <a:ea typeface="Pretendard" pitchFamily="34" charset="-122"/>
                 <a:cs typeface="Pretendard" pitchFamily="34" charset="-120"/>
               </a:rPr>
-              <a:t>Contextual Retrieval - </a:t>
-            </a:r>
-            <a:r>
-              <a:rPr lang="en-US" sz="3200" b="1" dirty="0" err="1">
-                <a:solidFill>
-                  <a:srgbClr val="2C2926"/>
-                </a:solidFill>
-                <a:latin typeface="Pretendard" pitchFamily="34" charset="0"/>
-                <a:ea typeface="Pretendard" pitchFamily="34" charset="-122"/>
-                <a:cs typeface="Pretendard" pitchFamily="34" charset="-120"/>
-              </a:rPr>
-              <a:t>청크에</a:t>
-            </a:r>
-            <a:r>
-              <a:rPr lang="en-US" sz="3200" b="1" dirty="0">
-                <a:solidFill>
-                  <a:srgbClr val="2C2926"/>
-                </a:solidFill>
-                <a:latin typeface="Pretendard" pitchFamily="34" charset="0"/>
-                <a:ea typeface="Pretendard" pitchFamily="34" charset="-122"/>
-                <a:cs typeface="Pretendard" pitchFamily="34" charset="-120"/>
-              </a:rPr>
-              <a:t> 문맥을 붙여 색인하기</a:t>
+              <a:t>Contextual Retrieval: 청크에 문맥을 붙여 색인하기</a:t>
             </a:r>
             <a:endParaRPr lang="en-US" sz="3200" dirty="0"/>
           </a:p>
@@ -1013,7 +1172,7 @@
           <a:bodyPr wrap="square" lIns="0" tIns="0" rIns="0" bIns="0" rtlCol="0" anchor="ctr"/>
           <a:lstStyle/>
           <a:p>
-            <a:pPr marL="0" indent="0">
+            <a:pPr indent="0" marL="0">
               <a:buNone/>
             </a:pPr>
             <a:r>
@@ -1056,7 +1215,7 @@
           <a:bodyPr wrap="square" lIns="0" tIns="0" rIns="0" bIns="0" rtlCol="0" anchor="ctr"/>
           <a:lstStyle/>
           <a:p>
-            <a:pPr marL="0" indent="0" algn="ctr">
+            <a:pPr algn="ctr" indent="0" marL="0">
               <a:buNone/>
             </a:pPr>
             <a:r>
@@ -1103,7 +1262,7 @@
           <a:bodyPr wrap="square" lIns="182880" tIns="128016" rIns="182880" bIns="91440" rtlCol="0" anchor="t"/>
           <a:lstStyle/>
           <a:p>
-            <a:pPr marL="0" indent="0" algn="l">
+            <a:pPr algn="l" indent="0" marL="0">
               <a:spcAft>
                 <a:spcPts val="1500"/>
               </a:spcAft>
@@ -1123,7 +1282,7 @@
             <a:endParaRPr lang="en-US" sz="1500" dirty="0"/>
           </a:p>
           <a:p>
-            <a:pPr marL="0" indent="0" algn="l">
+            <a:pPr algn="l" indent="0" marL="0">
               <a:spcAft>
                 <a:spcPts val="1500"/>
               </a:spcAft>
@@ -1143,7 +1302,7 @@
             <a:endParaRPr lang="en-US" sz="1500" dirty="0"/>
           </a:p>
           <a:p>
-            <a:pPr marL="0" indent="0" algn="l">
+            <a:pPr algn="l" indent="0" marL="0">
               <a:spcAft>
                 <a:spcPts val="1500"/>
               </a:spcAft>
@@ -1163,7 +1322,7 @@
             <a:endParaRPr lang="en-US" sz="1500" dirty="0"/>
           </a:p>
           <a:p>
-            <a:pPr marL="0" indent="0" algn="l">
+            <a:pPr algn="l" indent="0" marL="0">
               <a:spcAft>
                 <a:spcPts val="1500"/>
               </a:spcAft>
@@ -1209,20 +1368,9 @@
           <a:bodyPr wrap="square" lIns="0" tIns="0" rIns="0" bIns="0" rtlCol="0" anchor="ctr"/>
           <a:lstStyle/>
           <a:p>
-            <a:pPr marL="0" indent="0" algn="ctr">
+            <a:pPr algn="ctr" indent="0" marL="0">
               <a:buNone/>
             </a:pPr>
-            <a:r>
-              <a:rPr lang="en-US" sz="1800" b="1" dirty="0" err="1">
-                <a:solidFill>
-                  <a:srgbClr val="FFFFFF"/>
-                </a:solidFill>
-                <a:latin typeface="Pretendard" pitchFamily="34" charset="0"/>
-                <a:ea typeface="Pretendard" pitchFamily="34" charset="-122"/>
-                <a:cs typeface="Pretendard" pitchFamily="34" charset="-120"/>
-              </a:rPr>
-              <a:t>적용</a:t>
-            </a:r>
             <a:r>
               <a:rPr lang="en-US" sz="1800" b="1" dirty="0">
                 <a:solidFill>
@@ -1232,40 +1380,7 @@
                 <a:ea typeface="Pretendard" pitchFamily="34" charset="-122"/>
                 <a:cs typeface="Pretendard" pitchFamily="34" charset="-120"/>
               </a:rPr>
-              <a:t>(</a:t>
-            </a:r>
-            <a:r>
-              <a:rPr lang="ko-KR" altLang="en-US" b="1" dirty="0">
-                <a:solidFill>
-                  <a:srgbClr val="FFFFFF"/>
-                </a:solidFill>
-                <a:latin typeface="Pretendard" pitchFamily="34" charset="0"/>
-                <a:ea typeface="Pretendard" pitchFamily="34" charset="-122"/>
-                <a:cs typeface="Pretendard" pitchFamily="34" charset="-120"/>
-              </a:rPr>
-              <a:t>벡터</a:t>
-            </a:r>
-            <a:r>
-              <a:rPr lang="en-US" altLang="ko-KR" b="1" dirty="0">
-                <a:solidFill>
-                  <a:srgbClr val="FFFFFF"/>
-                </a:solidFill>
-                <a:latin typeface="Pretendard" pitchFamily="34" charset="0"/>
-                <a:ea typeface="Pretendard" pitchFamily="34" charset="-122"/>
-                <a:cs typeface="Pretendard" pitchFamily="34" charset="-120"/>
-              </a:rPr>
-              <a:t>DB</a:t>
-            </a:r>
-            <a:r>
-              <a:rPr lang="en-US" sz="1800" b="1" dirty="0">
-                <a:solidFill>
-                  <a:srgbClr val="FFFFFF"/>
-                </a:solidFill>
-                <a:latin typeface="Pretendard" pitchFamily="34" charset="0"/>
-                <a:ea typeface="Pretendard" pitchFamily="34" charset="-122"/>
-                <a:cs typeface="Pretendard" pitchFamily="34" charset="-120"/>
-              </a:rPr>
-              <a:t> + bm25s)</a:t>
+              <a:t>실습 적용(Chroma + bm25s)</a:t>
             </a:r>
             <a:endParaRPr lang="en-US" sz="1800" dirty="0"/>
           </a:p>
@@ -1300,7 +1415,7 @@
           <a:bodyPr wrap="square" lIns="182880" tIns="128016" rIns="182880" bIns="91440" rtlCol="0" anchor="t"/>
           <a:lstStyle/>
           <a:p>
-            <a:pPr marL="228600" indent="-228600" algn="l">
+            <a:pPr algn="l" marL="228600" indent="-228600">
               <a:spcAft>
                 <a:spcPts val="900"/>
               </a:spcAft>
@@ -1321,7 +1436,7 @@
             <a:endParaRPr lang="en-US" sz="1500" dirty="0"/>
           </a:p>
           <a:p>
-            <a:pPr marL="228600" indent="-228600" algn="l">
+            <a:pPr algn="l" marL="228600" indent="-228600">
               <a:spcAft>
                 <a:spcPts val="900"/>
               </a:spcAft>
@@ -1342,7 +1457,7 @@
             <a:endParaRPr lang="en-US" sz="1500" dirty="0"/>
           </a:p>
           <a:p>
-            <a:pPr marL="228600" indent="-228600" algn="l">
+            <a:pPr algn="l" marL="228600" indent="-228600">
               <a:spcAft>
                 <a:spcPts val="900"/>
               </a:spcAft>
@@ -1389,7 +1504,7 @@
           <a:bodyPr wrap="square" lIns="0" tIns="0" rIns="0" bIns="0" rtlCol="0" anchor="ctr"/>
           <a:lstStyle/>
           <a:p>
-            <a:pPr marL="0" indent="0" algn="ctr">
+            <a:pPr algn="ctr" indent="0" marL="0">
               <a:buNone/>
             </a:pPr>
             <a:r>
@@ -1433,13 +1548,6 @@
             <a:prstDash val="solid"/>
           </a:ln>
         </p:spPr>
-        <p:txBody>
-          <a:bodyPr/>
-          <a:lstStyle/>
-          <a:p>
-            <a:endParaRPr lang="ko-KR" altLang="en-US"/>
-          </a:p>
-        </p:txBody>
       </p:sp>
       <p:sp>
         <p:nvSpPr>
@@ -1462,13 +1570,6 @@
           </a:solidFill>
           <a:ln/>
         </p:spPr>
-        <p:txBody>
-          <a:bodyPr/>
-          <a:lstStyle/>
-          <a:p>
-            <a:endParaRPr lang="ko-KR" altLang="en-US"/>
-          </a:p>
-        </p:txBody>
       </p:sp>
       <p:sp>
         <p:nvSpPr>
@@ -1491,7 +1592,7 @@
           <a:bodyPr wrap="square" lIns="0" tIns="0" rIns="0" bIns="0" rtlCol="0" anchor="ctr"/>
           <a:lstStyle/>
           <a:p>
-            <a:pPr marL="0" indent="0" algn="ctr">
+            <a:pPr algn="ctr" indent="0" marL="0">
               <a:buNone/>
             </a:pPr>
             <a:r>
@@ -1530,7 +1631,7 @@
           <a:bodyPr wrap="square" lIns="0" tIns="0" rIns="0" bIns="0" rtlCol="0" anchor="ctr"/>
           <a:lstStyle/>
           <a:p>
-            <a:pPr marL="0" indent="0">
+            <a:pPr indent="0" marL="0">
               <a:buNone/>
             </a:pPr>
             <a:r>
@@ -1542,7 +1643,7 @@
                 <a:ea typeface="Pretendard" pitchFamily="34" charset="-122"/>
                 <a:cs typeface="Pretendard" pitchFamily="34" charset="-120"/>
               </a:rPr>
-              <a:t>문서를 청크로 나눔(실습 4단계와 같음)</a:t>
+              <a:t>문서를 청크로 나눔</a:t>
             </a:r>
             <a:endParaRPr lang="en-US" sz="1800" dirty="0"/>
           </a:p>
@@ -1574,13 +1675,6 @@
             <a:prstDash val="solid"/>
           </a:ln>
         </p:spPr>
-        <p:txBody>
-          <a:bodyPr/>
-          <a:lstStyle/>
-          <a:p>
-            <a:endParaRPr lang="ko-KR" altLang="en-US"/>
-          </a:p>
-        </p:txBody>
       </p:sp>
       <p:sp>
         <p:nvSpPr>
@@ -1603,13 +1697,6 @@
           </a:solidFill>
           <a:ln/>
         </p:spPr>
-        <p:txBody>
-          <a:bodyPr/>
-          <a:lstStyle/>
-          <a:p>
-            <a:endParaRPr lang="ko-KR" altLang="en-US"/>
-          </a:p>
-        </p:txBody>
       </p:sp>
       <p:sp>
         <p:nvSpPr>
@@ -1632,7 +1719,7 @@
           <a:bodyPr wrap="square" lIns="0" tIns="0" rIns="0" bIns="0" rtlCol="0" anchor="ctr"/>
           <a:lstStyle/>
           <a:p>
-            <a:pPr marL="0" indent="0" algn="ctr">
+            <a:pPr algn="ctr" indent="0" marL="0">
               <a:buNone/>
             </a:pPr>
             <a:r>
@@ -1671,7 +1758,7 @@
           <a:bodyPr wrap="square" lIns="0" tIns="0" rIns="0" bIns="0" rtlCol="0" anchor="ctr"/>
           <a:lstStyle/>
           <a:p>
-            <a:pPr marL="0" indent="0">
+            <a:pPr indent="0" marL="0">
               <a:buNone/>
             </a:pPr>
             <a:r>
@@ -1715,13 +1802,6 @@
             <a:prstDash val="solid"/>
           </a:ln>
         </p:spPr>
-        <p:txBody>
-          <a:bodyPr/>
-          <a:lstStyle/>
-          <a:p>
-            <a:endParaRPr lang="ko-KR" altLang="en-US"/>
-          </a:p>
-        </p:txBody>
       </p:sp>
       <p:sp>
         <p:nvSpPr>
@@ -1744,13 +1824,6 @@
           </a:solidFill>
           <a:ln/>
         </p:spPr>
-        <p:txBody>
-          <a:bodyPr/>
-          <a:lstStyle/>
-          <a:p>
-            <a:endParaRPr lang="ko-KR" altLang="en-US"/>
-          </a:p>
-        </p:txBody>
       </p:sp>
       <p:sp>
         <p:nvSpPr>
@@ -1773,7 +1846,7 @@
           <a:bodyPr wrap="square" lIns="0" tIns="0" rIns="0" bIns="0" rtlCol="0" anchor="ctr"/>
           <a:lstStyle/>
           <a:p>
-            <a:pPr marL="0" indent="0" algn="ctr">
+            <a:pPr algn="ctr" indent="0" marL="0">
               <a:buNone/>
             </a:pPr>
             <a:r>
@@ -1812,7 +1885,7 @@
           <a:bodyPr wrap="square" lIns="0" tIns="0" rIns="0" bIns="0" rtlCol="0" anchor="ctr"/>
           <a:lstStyle/>
           <a:p>
-            <a:pPr marL="0" indent="0">
+            <a:pPr indent="0" marL="0">
               <a:buNone/>
             </a:pPr>
             <a:r>
@@ -1856,13 +1929,6 @@
             <a:prstDash val="solid"/>
           </a:ln>
         </p:spPr>
-        <p:txBody>
-          <a:bodyPr/>
-          <a:lstStyle/>
-          <a:p>
-            <a:endParaRPr lang="ko-KR" altLang="en-US"/>
-          </a:p>
-        </p:txBody>
       </p:sp>
       <p:sp>
         <p:nvSpPr>
@@ -1885,13 +1951,6 @@
           </a:solidFill>
           <a:ln/>
         </p:spPr>
-        <p:txBody>
-          <a:bodyPr/>
-          <a:lstStyle/>
-          <a:p>
-            <a:endParaRPr lang="ko-KR" altLang="en-US"/>
-          </a:p>
-        </p:txBody>
       </p:sp>
       <p:sp>
         <p:nvSpPr>
@@ -1914,7 +1973,7 @@
           <a:bodyPr wrap="square" lIns="0" tIns="0" rIns="0" bIns="0" rtlCol="0" anchor="ctr"/>
           <a:lstStyle/>
           <a:p>
-            <a:pPr marL="0" indent="0" algn="ctr">
+            <a:pPr algn="ctr" indent="0" marL="0">
               <a:buNone/>
             </a:pPr>
             <a:r>
@@ -1953,7 +2012,7 @@
           <a:bodyPr wrap="square" lIns="0" tIns="0" rIns="0" bIns="0" rtlCol="0" anchor="ctr"/>
           <a:lstStyle/>
           <a:p>
-            <a:pPr marL="0" indent="0">
+            <a:pPr indent="0" marL="0">
               <a:buNone/>
             </a:pPr>
             <a:r>
@@ -1996,7 +2055,7 @@
           <a:bodyPr wrap="square" lIns="0" tIns="0" rIns="0" bIns="0" rtlCol="0" anchor="ctr"/>
           <a:lstStyle/>
           <a:p>
-            <a:pPr marL="0" indent="0" algn="ctr">
+            <a:pPr algn="ctr" indent="0" marL="0">
               <a:buNone/>
             </a:pPr>
             <a:r>
@@ -2016,7 +2075,7 @@
       </p:sp>
       <p:graphicFrame>
         <p:nvGraphicFramePr>
-          <p:cNvPr id="26" name="Table 0"/>
+          <p:cNvPr id="2" name="Table 0"/>
           <p:cNvGraphicFramePr>
             <a:graphicFrameLocks noGrp="1"/>
           </p:cNvGraphicFramePr>
@@ -2030,34 +2089,16 @@
         </p:nvGraphicFramePr>
         <p:xfrm>
           <a:off x="9379001" y="2240280"/>
-          <a:ext cx="4754880" cy="2240280"/>
+          <a:ext cx="4754880" cy="914400"/>
         </p:xfrm>
         <a:graphic>
           <a:graphicData uri="http://schemas.openxmlformats.org/drawingml/2006/table">
             <a:tbl>
               <a:tblPr/>
               <a:tblGrid>
-                <a:gridCol w="2011680">
-                  <a:extLst>
-                    <a:ext uri="{9D8B030D-6E8A-4147-A177-3AD203B41FA5}">
-                      <a16:colId xmlns:a16="http://schemas.microsoft.com/office/drawing/2014/main" val="20000"/>
-                    </a:ext>
-                  </a:extLst>
-                </a:gridCol>
-                <a:gridCol w="1371600">
-                  <a:extLst>
-                    <a:ext uri="{9D8B030D-6E8A-4147-A177-3AD203B41FA5}">
-                      <a16:colId xmlns:a16="http://schemas.microsoft.com/office/drawing/2014/main" val="20001"/>
-                    </a:ext>
-                  </a:extLst>
-                </a:gridCol>
-                <a:gridCol w="1371600">
-                  <a:extLst>
-                    <a:ext uri="{9D8B030D-6E8A-4147-A177-3AD203B41FA5}">
-                      <a16:colId xmlns:a16="http://schemas.microsoft.com/office/drawing/2014/main" val="20002"/>
-                    </a:ext>
-                  </a:extLst>
-                </a:gridCol>
+                <a:gridCol w="2011680"/>
+                <a:gridCol w="1371600"/>
+                <a:gridCol w="1371600"/>
               </a:tblGrid>
               <a:tr h="411480">
                 <a:tc>
@@ -2065,7 +2106,7 @@
                     <a:bodyPr/>
                     <a:lstStyle/>
                     <a:p>
-                      <a:pPr marL="0" indent="0">
+                      <a:pPr indent="0" marL="0">
                         <a:buNone/>
                       </a:pPr>
                       <a:r>
@@ -2086,7 +2127,7 @@
                       </a:endParaRPr>
                     </a:p>
                   </a:txBody>
-                  <a:tcPr marL="73152" marR="73152" anchor="ctr">
+                  <a:tcPr marL="73152" marR="73152" marT="45720" marB="45720" anchor="ctr">
                     <a:lnL w="12700" cap="flat" cmpd="sng" algn="ctr">
                       <a:solidFill>
                         <a:srgbClr val="EDF0F6"/>
@@ -2133,7 +2174,7 @@
                     <a:bodyPr/>
                     <a:lstStyle/>
                     <a:p>
-                      <a:pPr marL="0" indent="0">
+                      <a:pPr indent="0" marL="0">
                         <a:buNone/>
                       </a:pPr>
                       <a:r>
@@ -2154,7 +2195,7 @@
                       </a:endParaRPr>
                     </a:p>
                   </a:txBody>
-                  <a:tcPr marL="73152" marR="73152" anchor="ctr">
+                  <a:tcPr marL="73152" marR="73152" marT="45720" marB="45720" anchor="ctr">
                     <a:lnL w="12700" cap="flat" cmpd="sng" algn="ctr">
                       <a:solidFill>
                         <a:srgbClr val="EDF0F6"/>
@@ -2201,7 +2242,7 @@
                     <a:bodyPr/>
                     <a:lstStyle/>
                     <a:p>
-                      <a:pPr marL="0" indent="0">
+                      <a:pPr indent="0" marL="0">
                         <a:buNone/>
                       </a:pPr>
                       <a:r>
@@ -2222,7 +2263,7 @@
                       </a:endParaRPr>
                     </a:p>
                   </a:txBody>
-                  <a:tcPr marL="73152" marR="73152" anchor="ctr">
+                  <a:tcPr marL="73152" marR="73152" marT="45720" marB="45720" anchor="ctr">
                     <a:lnL w="12700" cap="flat" cmpd="sng" algn="ctr">
                       <a:solidFill>
                         <a:srgbClr val="EDF0F6"/>
@@ -2264,11 +2305,6 @@
                     </a:solidFill>
                   </a:tcPr>
                 </a:tc>
-                <a:extLst>
-                  <a:ext uri="{0D108BD9-81ED-4DB2-BD59-A6C34878D82A}">
-                    <a16:rowId xmlns:a16="http://schemas.microsoft.com/office/drawing/2014/main" val="10000"/>
-                  </a:ext>
-                </a:extLst>
               </a:tr>
               <a:tr h="457200">
                 <a:tc>
@@ -2276,7 +2312,7 @@
                     <a:bodyPr/>
                     <a:lstStyle/>
                     <a:p>
-                      <a:pPr marL="0" indent="0">
+                      <a:pPr indent="0" marL="0">
                         <a:buNone/>
                       </a:pPr>
                       <a:r>
@@ -2297,7 +2333,7 @@
                       </a:endParaRPr>
                     </a:p>
                   </a:txBody>
-                  <a:tcPr marL="73152" marR="73152" anchor="ctr">
+                  <a:tcPr marL="73152" marR="73152" marT="45720" marB="45720" anchor="ctr">
                     <a:lnL w="12700" cap="flat" cmpd="sng" algn="ctr">
                       <a:solidFill>
                         <a:srgbClr val="EDF0F6"/>
@@ -2344,7 +2380,7 @@
                     <a:bodyPr/>
                     <a:lstStyle/>
                     <a:p>
-                      <a:pPr marL="0" indent="0">
+                      <a:pPr indent="0" marL="0">
                         <a:buNone/>
                       </a:pPr>
                       <a:r>
@@ -2365,7 +2401,7 @@
                       </a:endParaRPr>
                     </a:p>
                   </a:txBody>
-                  <a:tcPr marL="73152" marR="73152" anchor="ctr">
+                  <a:tcPr marL="73152" marR="73152" marT="45720" marB="45720" anchor="ctr">
                     <a:lnL w="12700" cap="flat" cmpd="sng" algn="ctr">
                       <a:solidFill>
                         <a:srgbClr val="EDF0F6"/>
@@ -2412,7 +2448,7 @@
                     <a:bodyPr/>
                     <a:lstStyle/>
                     <a:p>
-                      <a:pPr marL="0" indent="0">
+                      <a:pPr indent="0" marL="0">
                         <a:buNone/>
                       </a:pPr>
                       <a:r>
@@ -2433,7 +2469,7 @@
                       </a:endParaRPr>
                     </a:p>
                   </a:txBody>
-                  <a:tcPr marL="73152" marR="73152" anchor="ctr">
+                  <a:tcPr marL="73152" marR="73152" marT="45720" marB="45720" anchor="ctr">
                     <a:lnL w="12700" cap="flat" cmpd="sng" algn="ctr">
                       <a:solidFill>
                         <a:srgbClr val="EDF0F6"/>
@@ -2475,11 +2511,6 @@
                     </a:solidFill>
                   </a:tcPr>
                 </a:tc>
-                <a:extLst>
-                  <a:ext uri="{0D108BD9-81ED-4DB2-BD59-A6C34878D82A}">
-                    <a16:rowId xmlns:a16="http://schemas.microsoft.com/office/drawing/2014/main" val="10001"/>
-                  </a:ext>
-                </a:extLst>
               </a:tr>
               <a:tr h="457200">
                 <a:tc>
@@ -2487,7 +2518,7 @@
                     <a:bodyPr/>
                     <a:lstStyle/>
                     <a:p>
-                      <a:pPr marL="0" indent="0">
+                      <a:pPr indent="0" marL="0">
                         <a:buNone/>
                       </a:pPr>
                       <a:r>
@@ -2508,7 +2539,7 @@
                       </a:endParaRPr>
                     </a:p>
                   </a:txBody>
-                  <a:tcPr marL="73152" marR="73152" anchor="ctr">
+                  <a:tcPr marL="73152" marR="73152" marT="45720" marB="45720" anchor="ctr">
                     <a:lnL w="12700" cap="flat" cmpd="sng" algn="ctr">
                       <a:solidFill>
                         <a:srgbClr val="EDF0F6"/>
@@ -2555,7 +2586,7 @@
                     <a:bodyPr/>
                     <a:lstStyle/>
                     <a:p>
-                      <a:pPr marL="0" indent="0">
+                      <a:pPr indent="0" marL="0">
                         <a:buNone/>
                       </a:pPr>
                       <a:r>
@@ -2576,7 +2607,7 @@
                       </a:endParaRPr>
                     </a:p>
                   </a:txBody>
-                  <a:tcPr marL="73152" marR="73152" anchor="ctr">
+                  <a:tcPr marL="73152" marR="73152" marT="45720" marB="45720" anchor="ctr">
                     <a:lnL w="12700" cap="flat" cmpd="sng" algn="ctr">
                       <a:solidFill>
                         <a:srgbClr val="EDF0F6"/>
@@ -2623,7 +2654,7 @@
                     <a:bodyPr/>
                     <a:lstStyle/>
                     <a:p>
-                      <a:pPr marL="0" indent="0">
+                      <a:pPr indent="0" marL="0">
                         <a:buNone/>
                       </a:pPr>
                       <a:r>
@@ -2644,7 +2675,7 @@
                       </a:endParaRPr>
                     </a:p>
                   </a:txBody>
-                  <a:tcPr marL="73152" marR="73152" anchor="ctr">
+                  <a:tcPr marL="73152" marR="73152" marT="45720" marB="45720" anchor="ctr">
                     <a:lnL w="12700" cap="flat" cmpd="sng" algn="ctr">
                       <a:solidFill>
                         <a:srgbClr val="EDF0F6"/>
@@ -2686,11 +2717,6 @@
                     </a:solidFill>
                   </a:tcPr>
                 </a:tc>
-                <a:extLst>
-                  <a:ext uri="{0D108BD9-81ED-4DB2-BD59-A6C34878D82A}">
-                    <a16:rowId xmlns:a16="http://schemas.microsoft.com/office/drawing/2014/main" val="10002"/>
-                  </a:ext>
-                </a:extLst>
               </a:tr>
               <a:tr h="457200">
                 <a:tc>
@@ -2698,7 +2724,7 @@
                     <a:bodyPr/>
                     <a:lstStyle/>
                     <a:p>
-                      <a:pPr marL="0" indent="0">
+                      <a:pPr indent="0" marL="0">
                         <a:buNone/>
                       </a:pPr>
                       <a:r>
@@ -2719,7 +2745,7 @@
                       </a:endParaRPr>
                     </a:p>
                   </a:txBody>
-                  <a:tcPr marL="73152" marR="73152" anchor="ctr">
+                  <a:tcPr marL="73152" marR="73152" marT="45720" marB="45720" anchor="ctr">
                     <a:lnL w="12700" cap="flat" cmpd="sng" algn="ctr">
                       <a:solidFill>
                         <a:srgbClr val="EDF0F6"/>
@@ -2766,7 +2792,7 @@
                     <a:bodyPr/>
                     <a:lstStyle/>
                     <a:p>
-                      <a:pPr marL="0" indent="0">
+                      <a:pPr indent="0" marL="0">
                         <a:buNone/>
                       </a:pPr>
                       <a:r>
@@ -2787,7 +2813,7 @@
                       </a:endParaRPr>
                     </a:p>
                   </a:txBody>
-                  <a:tcPr marL="73152" marR="73152" anchor="ctr">
+                  <a:tcPr marL="73152" marR="73152" marT="45720" marB="45720" anchor="ctr">
                     <a:lnL w="12700" cap="flat" cmpd="sng" algn="ctr">
                       <a:solidFill>
                         <a:srgbClr val="EDF0F6"/>
@@ -2834,7 +2860,7 @@
                     <a:bodyPr/>
                     <a:lstStyle/>
                     <a:p>
-                      <a:pPr marL="0" indent="0">
+                      <a:pPr indent="0" marL="0">
                         <a:buNone/>
                       </a:pPr>
                       <a:r>
@@ -2855,7 +2881,7 @@
                       </a:endParaRPr>
                     </a:p>
                   </a:txBody>
-                  <a:tcPr marL="73152" marR="73152" anchor="ctr">
+                  <a:tcPr marL="73152" marR="73152" marT="45720" marB="45720" anchor="ctr">
                     <a:lnL w="12700" cap="flat" cmpd="sng" algn="ctr">
                       <a:solidFill>
                         <a:srgbClr val="EDF0F6"/>
@@ -2897,11 +2923,6 @@
                     </a:solidFill>
                   </a:tcPr>
                 </a:tc>
-                <a:extLst>
-                  <a:ext uri="{0D108BD9-81ED-4DB2-BD59-A6C34878D82A}">
-                    <a16:rowId xmlns:a16="http://schemas.microsoft.com/office/drawing/2014/main" val="10003"/>
-                  </a:ext>
-                </a:extLst>
               </a:tr>
               <a:tr h="457200">
                 <a:tc>
@@ -2909,7 +2930,7 @@
                     <a:bodyPr/>
                     <a:lstStyle/>
                     <a:p>
-                      <a:pPr marL="0" indent="0">
+                      <a:pPr indent="0" marL="0">
                         <a:buNone/>
                       </a:pPr>
                       <a:r>
@@ -2930,7 +2951,7 @@
                       </a:endParaRPr>
                     </a:p>
                   </a:txBody>
-                  <a:tcPr marL="73152" marR="73152" anchor="ctr">
+                  <a:tcPr marL="73152" marR="73152" marT="45720" marB="45720" anchor="ctr">
                     <a:lnL w="12700" cap="flat" cmpd="sng" algn="ctr">
                       <a:solidFill>
                         <a:srgbClr val="EDF0F6"/>
@@ -2977,7 +2998,7 @@
                     <a:bodyPr/>
                     <a:lstStyle/>
                     <a:p>
-                      <a:pPr marL="0" indent="0">
+                      <a:pPr indent="0" marL="0">
                         <a:buNone/>
                       </a:pPr>
                       <a:r>
@@ -2998,7 +3019,7 @@
                       </a:endParaRPr>
                     </a:p>
                   </a:txBody>
-                  <a:tcPr marL="73152" marR="73152" anchor="ctr">
+                  <a:tcPr marL="73152" marR="73152" marT="45720" marB="45720" anchor="ctr">
                     <a:lnL w="12700" cap="flat" cmpd="sng" algn="ctr">
                       <a:solidFill>
                         <a:srgbClr val="EDF0F6"/>
@@ -3045,7 +3066,7 @@
                     <a:bodyPr/>
                     <a:lstStyle/>
                     <a:p>
-                      <a:pPr marL="0" indent="0">
+                      <a:pPr indent="0" marL="0">
                         <a:buNone/>
                       </a:pPr>
                       <a:r>
@@ -3066,7 +3087,7 @@
                       </a:endParaRPr>
                     </a:p>
                   </a:txBody>
-                  <a:tcPr marL="73152" marR="73152" anchor="ctr">
+                  <a:tcPr marL="73152" marR="73152" marT="45720" marB="45720" anchor="ctr">
                     <a:lnL w="12700" cap="flat" cmpd="sng" algn="ctr">
                       <a:solidFill>
                         <a:srgbClr val="EDF0F6"/>
@@ -3108,11 +3129,6 @@
                     </a:solidFill>
                   </a:tcPr>
                 </a:tc>
-                <a:extLst>
-                  <a:ext uri="{0D108BD9-81ED-4DB2-BD59-A6C34878D82A}">
-                    <a16:rowId xmlns:a16="http://schemas.microsoft.com/office/drawing/2014/main" val="10004"/>
-                  </a:ext>
-                </a:extLst>
               </a:tr>
             </a:tbl>
           </a:graphicData>
@@ -3143,7 +3159,7 @@
           <a:bodyPr wrap="square" lIns="0" tIns="0" rIns="0" bIns="0" rtlCol="0" anchor="ctr"/>
           <a:lstStyle/>
           <a:p>
-            <a:pPr marL="0" indent="0" algn="ctr">
+            <a:pPr algn="ctr" indent="0" marL="0">
               <a:buNone/>
             </a:pPr>
             <a:r>
@@ -3190,7 +3206,7 @@
           <a:bodyPr wrap="square" lIns="182880" tIns="128016" rIns="182880" bIns="91440" rtlCol="0" anchor="t"/>
           <a:lstStyle/>
           <a:p>
-            <a:pPr marL="228600" indent="-228600" algn="l">
+            <a:pPr algn="l" marL="228600" indent="-228600">
               <a:spcAft>
                 <a:spcPts val="700"/>
               </a:spcAft>
@@ -3211,7 +3227,7 @@
             <a:endParaRPr lang="en-US" sz="1400" dirty="0"/>
           </a:p>
           <a:p>
-            <a:pPr marL="228600" indent="-228600" algn="l">
+            <a:pPr algn="l" marL="228600" indent="-228600">
               <a:spcAft>
                 <a:spcPts val="700"/>
               </a:spcAft>
@@ -3252,13 +3268,6 @@
           </a:solidFill>
           <a:ln/>
         </p:spPr>
-        <p:txBody>
-          <a:bodyPr/>
-          <a:lstStyle/>
-          <a:p>
-            <a:endParaRPr lang="ko-KR" altLang="en-US"/>
-          </a:p>
-        </p:txBody>
       </p:sp>
       <p:sp>
         <p:nvSpPr>
@@ -3281,7 +3290,7 @@
           <a:bodyPr wrap="square" lIns="0" tIns="0" rIns="0" bIns="0" rtlCol="0" anchor="ctr"/>
           <a:lstStyle/>
           <a:p>
-            <a:pPr marL="0" indent="0">
+            <a:pPr indent="0" marL="0">
               <a:buNone/>
             </a:pPr>
             <a:r>
@@ -3325,18 +3334,11 @@
             <a:prstDash val="solid"/>
           </a:ln>
         </p:spPr>
-        <p:txBody>
-          <a:bodyPr/>
-          <a:lstStyle/>
-          <a:p>
-            <a:endParaRPr lang="ko-KR" altLang="en-US"/>
-          </a:p>
-        </p:txBody>
       </p:sp>
       <p:sp>
         <p:nvSpPr>
           <p:cNvPr id="32" name="Text 29">
-            <a:hlinkClick r:id="rId3"/>
+            <a:hlinkClick r:id="rId1" tooltip=""/>
           </p:cNvPr>
           <p:cNvSpPr/>
           <p:nvPr/>
@@ -3356,7 +3358,7 @@
           <a:bodyPr wrap="square" lIns="0" tIns="0" rIns="0" bIns="0" rtlCol="0" anchor="ctr"/>
           <a:lstStyle/>
           <a:p>
-            <a:pPr marL="0" indent="0" algn="ctr">
+            <a:pPr algn="ctr" indent="0" marL="0">
               <a:buNone/>
             </a:pPr>
             <a:r>
@@ -3367,7 +3369,7 @@
                 <a:latin typeface="Pretendard" pitchFamily="34" charset="0"/>
                 <a:ea typeface="Pretendard" pitchFamily="34" charset="-122"/>
                 <a:cs typeface="Pretendard" pitchFamily="34" charset="-120"/>
-                <a:hlinkClick r:id="rId3">
+                <a:hlinkClick r:id="rId1" invalidUrl="" action="" tgtFrame="" tooltip="" history="1" highlightClick="0" endSnd="0">
                   <a:extLst>
                     <a:ext uri="{A12FA001-AC4F-418D-AE19-62706E023703}">
                       <ahyp:hlinkClr xmlns:ahyp="http://schemas.microsoft.com/office/drawing/2018/hyperlinkcolor" val="tx"/>
@@ -3403,13 +3405,6 @@
             <a:prstDash val="solid"/>
           </a:ln>
         </p:spPr>
-        <p:txBody>
-          <a:bodyPr/>
-          <a:lstStyle/>
-          <a:p>
-            <a:endParaRPr lang="ko-KR" altLang="en-US"/>
-          </a:p>
-        </p:txBody>
       </p:sp>
       <p:sp>
         <p:nvSpPr>
@@ -3432,11 +3427,11 @@
           <a:bodyPr wrap="square" lIns="0" tIns="0" rIns="0" bIns="0" rtlCol="0" anchor="t"/>
           <a:lstStyle/>
           <a:p>
-            <a:pPr marL="0" indent="0">
+            <a:pPr indent="0" marL="0">
               <a:buNone/>
             </a:pPr>
             <a:r>
-              <a:rPr lang="en-US" sz="1400" dirty="0">
+              <a:rPr lang="en-US" sz="1200" dirty="0">
                 <a:solidFill>
                   <a:srgbClr val="7C8598"/>
                 </a:solidFill>
@@ -3444,15 +3439,15 @@
                 <a:ea typeface="Pretendard" pitchFamily="34" charset="-122"/>
                 <a:cs typeface="Pretendard" pitchFamily="34" charset="-120"/>
               </a:rPr>
-              <a:t>출처: Anthropic, Introducing Contextual Retrieval (2024-09-19). Anthropic 쿡북 contextual-embeddings 노트북</a:t>
+              <a:t>출처: Anthropic, Introducing Contextual Retrieval (2024-09-19). Anthropic 쿡북 contextual-embeddings 노트북. 후속 연구: Adaptive Chunking, SCAR, 청킹 가치 평가 (arXiv 2026)</a:t>
             </a:r>
-            <a:endParaRPr lang="en-US" sz="1400" dirty="0"/>
+            <a:endParaRPr lang="en-US" sz="1200" dirty="0"/>
           </a:p>
         </p:txBody>
       </p:sp>
       <p:sp>
         <p:nvSpPr>
-          <p:cNvPr id="35" name="Slide Number Placeholder 0"/>
+          <p:cNvPr id="25" name="Slide Number Placeholder 0"/>
           <p:cNvSpPr>
             <a:spLocks noGrp="1"/>
           </p:cNvSpPr>
@@ -3470,7 +3465,7 @@
           </a:prstGeom>
           <a:extLst>
             <a:ext uri="{C572A759-6A51-4108-AA02-DFA0A04FC94B}">
-              <ma14:wrappingTextBoxFlag xmlns:ma14="http://schemas.microsoft.com/office/mac/drawingml/2011/main" xmlns="" val="0"/>
+              <ma14:wrappingTextBoxFlag xmlns:ma14="http://schemas.microsoft.com/office/mac/drawingml/2011/main" val="0"/>
             </a:ext>
           </a:extLst>
         </p:spPr>
@@ -3491,7 +3486,7 @@
           <a:p>
             <a:pPr algn="r"/>
             <a:fld id="{F7021451-1387-4CA6-816F-3879F97B5CBC}" type="slidenum">
-              <a:rPr lang="en-US" b="0"/>
+              <a:rPr b="0" lang="en-US"/>
               <a:t>1</a:t>
             </a:fld>
             <a:endParaRPr lang="en-US"/>
@@ -3799,319 +3794,4 @@
     </a:ext>
   </a:extLst>
 </a:theme>
-</file>
-
-<file path=ppt/theme/theme2.xml><?xml version="1.0" encoding="utf-8"?>
-<a:theme xmlns:a="http://schemas.openxmlformats.org/drawingml/2006/main" name="Office 테마">
-  <a:themeElements>
-    <a:clrScheme name="Office">
-      <a:dk1>
-        <a:sysClr val="windowText" lastClr="000000"/>
-      </a:dk1>
-      <a:lt1>
-        <a:sysClr val="window" lastClr="FFFFFF"/>
-      </a:lt1>
-      <a:dk2>
-        <a:srgbClr val="0E2841"/>
-      </a:dk2>
-      <a:lt2>
-        <a:srgbClr val="E8E8E8"/>
-      </a:lt2>
-      <a:accent1>
-        <a:srgbClr val="156082"/>
-      </a:accent1>
-      <a:accent2>
-        <a:srgbClr val="E97132"/>
-      </a:accent2>
-      <a:accent3>
-        <a:srgbClr val="196B24"/>
-      </a:accent3>
-      <a:accent4>
-        <a:srgbClr val="0F9ED5"/>
-      </a:accent4>
-      <a:accent5>
-        <a:srgbClr val="A02B93"/>
-      </a:accent5>
-      <a:accent6>
-        <a:srgbClr val="4EA72E"/>
-      </a:accent6>
-      <a:hlink>
-        <a:srgbClr val="467886"/>
-      </a:hlink>
-      <a:folHlink>
-        <a:srgbClr val="96607D"/>
-      </a:folHlink>
-    </a:clrScheme>
-    <a:fontScheme name="Office">
-      <a:majorFont>
-        <a:latin typeface="맑은 고딕" panose="02110004020202020204"/>
-        <a:ea typeface=""/>
-        <a:cs typeface=""/>
-        <a:font script="Jpan" typeface="游ゴシック Light"/>
-        <a:font script="Hang" typeface="맑은 고딕"/>
-        <a:font script="Hans" typeface="等线 Light"/>
-        <a:font script="Hant" typeface="新細明體"/>
-        <a:font script="Arab" typeface="Times New Roman"/>
-        <a:font script="Hebr" typeface="Times New Roman"/>
-        <a:font script="Thai" typeface="Angsana New"/>
-        <a:font script="Ethi" typeface="Nyala"/>
-        <a:font script="Beng" typeface="Vrinda"/>
-        <a:font script="Gujr" typeface="Shruti"/>
-        <a:font script="Khmr" typeface="MoolBoran"/>
-        <a:font script="Knda" typeface="Tunga"/>
-        <a:font script="Guru" typeface="Raavi"/>
-        <a:font script="Cans" typeface="Euphemia"/>
-        <a:font script="Cher" typeface="Plantagenet Cherokee"/>
-        <a:font script="Yiii" typeface="Microsoft Yi Baiti"/>
-        <a:font script="Tibt" typeface="Microsoft Himalaya"/>
-        <a:font script="Thaa" typeface="MV Boli"/>
-        <a:font script="Deva" typeface="Mangal"/>
-        <a:font script="Telu" typeface="Gautami"/>
-        <a:font script="Taml" typeface="Latha"/>
-        <a:font script="Syrc" typeface="Estrangelo Edessa"/>
-        <a:font script="Orya" typeface="Kalinga"/>
-        <a:font script="Mlym" typeface="Kartika"/>
-        <a:font script="Laoo" typeface="DokChampa"/>
-        <a:font script="Sinh" typeface="Iskoola Pota"/>
-        <a:font script="Mong" typeface="Mongolian Baiti"/>
-        <a:font script="Viet" typeface="Times New Roman"/>
-        <a:font script="Uigh" typeface="Microsoft Uighur"/>
-        <a:font script="Geor" typeface="Sylfaen"/>
-        <a:font script="Armn" typeface="Arial"/>
-        <a:font script="Bugi" typeface="Leelawadee UI"/>
-        <a:font script="Bopo" typeface="Microsoft JhengHei"/>
-        <a:font script="Java" typeface="Javanese Text"/>
-        <a:font script="Lisu" typeface="Segoe UI"/>
-        <a:font script="Mymr" typeface="Myanmar Text"/>
-        <a:font script="Nkoo" typeface="Ebrima"/>
-        <a:font script="Olck" typeface="Nirmala UI"/>
-        <a:font script="Osma" typeface="Ebrima"/>
-        <a:font script="Phag" typeface="Phagspa"/>
-        <a:font script="Syrn" typeface="Estrangelo Edessa"/>
-        <a:font script="Syrj" typeface="Estrangelo Edessa"/>
-        <a:font script="Syre" typeface="Estrangelo Edessa"/>
-        <a:font script="Sora" typeface="Nirmala UI"/>
-        <a:font script="Tale" typeface="Microsoft Tai Le"/>
-        <a:font script="Talu" typeface="Microsoft New Tai Lue"/>
-        <a:font script="Tfng" typeface="Ebrima"/>
-      </a:majorFont>
-      <a:minorFont>
-        <a:latin typeface="맑은 고딕" panose="02110004020202020204"/>
-        <a:ea typeface=""/>
-        <a:cs typeface=""/>
-        <a:font script="Jpan" typeface="游ゴシック"/>
-        <a:font script="Hang" typeface="맑은 고딕"/>
-        <a:font script="Hans" typeface="等线"/>
-        <a:font script="Hant" typeface="新細明體"/>
-        <a:font script="Arab" typeface="Arial"/>
-        <a:font script="Hebr" typeface="Arial"/>
-        <a:font script="Thai" typeface="Cordia New"/>
-        <a:font script="Ethi" typeface="Nyala"/>
-        <a:font script="Beng" typeface="Vrinda"/>
-        <a:font script="Gujr" typeface="Shruti"/>
-        <a:font script="Khmr" typeface="DaunPenh"/>
-        <a:font script="Knda" typeface="Tunga"/>
-        <a:font script="Guru" typeface="Raavi"/>
-        <a:font script="Cans" typeface="Euphemia"/>
-        <a:font script="Cher" typeface="Plantagenet Cherokee"/>
-        <a:font script="Yiii" typeface="Microsoft Yi Baiti"/>
-        <a:font script="Tibt" typeface="Microsoft Himalaya"/>
-        <a:font script="Thaa" typeface="MV Boli"/>
-        <a:font script="Deva" typeface="Mangal"/>
-        <a:font script="Telu" typeface="Gautami"/>
-        <a:font script="Taml" typeface="Latha"/>
-        <a:font script="Syrc" typeface="Estrangelo Edessa"/>
-        <a:font script="Orya" typeface="Kalinga"/>
-        <a:font script="Mlym" typeface="Kartika"/>
-        <a:font script="Laoo" typeface="DokChampa"/>
-        <a:font script="Sinh" typeface="Iskoola Pota"/>
-        <a:font script="Mong" typeface="Mongolian Baiti"/>
-        <a:font script="Viet" typeface="Arial"/>
-        <a:font script="Uigh" typeface="Microsoft Uighur"/>
-        <a:font script="Geor" typeface="Sylfaen"/>
-        <a:font script="Armn" typeface="Arial"/>
-        <a:font script="Bugi" typeface="Leelawadee UI"/>
-        <a:font script="Bopo" typeface="Microsoft JhengHei"/>
-        <a:font script="Java" typeface="Javanese Text"/>
-        <a:font script="Lisu" typeface="Segoe UI"/>
-        <a:font script="Mymr" typeface="Myanmar Text"/>
-        <a:font script="Nkoo" typeface="Ebrima"/>
-        <a:font script="Olck" typeface="Nirmala UI"/>
-        <a:font script="Osma" typeface="Ebrima"/>
-        <a:font script="Phag" typeface="Phagspa"/>
-        <a:font script="Syrn" typeface="Estrangelo Edessa"/>
-        <a:font script="Syrj" typeface="Estrangelo Edessa"/>
-        <a:font script="Syre" typeface="Estrangelo Edessa"/>
-        <a:font script="Sora" typeface="Nirmala UI"/>
-        <a:font script="Tale" typeface="Microsoft Tai Le"/>
-        <a:font script="Talu" typeface="Microsoft New Tai Lue"/>
-        <a:font script="Tfng" typeface="Ebrima"/>
-      </a:minorFont>
-    </a:fontScheme>
-    <a:fmtScheme name="Office">
-      <a:fillStyleLst>
-        <a:solidFill>
-          <a:schemeClr val="phClr"/>
-        </a:solidFill>
-        <a:gradFill rotWithShape="1">
-          <a:gsLst>
-            <a:gs pos="0">
-              <a:schemeClr val="phClr">
-                <a:lumMod val="110000"/>
-                <a:satMod val="105000"/>
-                <a:tint val="67000"/>
-              </a:schemeClr>
-            </a:gs>
-            <a:gs pos="50000">
-              <a:schemeClr val="phClr">
-                <a:lumMod val="105000"/>
-                <a:satMod val="103000"/>
-                <a:tint val="73000"/>
-              </a:schemeClr>
-            </a:gs>
-            <a:gs pos="100000">
-              <a:schemeClr val="phClr">
-                <a:lumMod val="105000"/>
-                <a:satMod val="109000"/>
-                <a:tint val="81000"/>
-              </a:schemeClr>
-            </a:gs>
-          </a:gsLst>
-          <a:lin ang="5400000" scaled="0"/>
-        </a:gradFill>
-        <a:gradFill rotWithShape="1">
-          <a:gsLst>
-            <a:gs pos="0">
-              <a:schemeClr val="phClr">
-                <a:satMod val="103000"/>
-                <a:lumMod val="102000"/>
-                <a:tint val="94000"/>
-              </a:schemeClr>
-            </a:gs>
-            <a:gs pos="50000">
-              <a:schemeClr val="phClr">
-                <a:satMod val="110000"/>
-                <a:lumMod val="100000"/>
-                <a:shade val="100000"/>
-              </a:schemeClr>
-            </a:gs>
-            <a:gs pos="100000">
-              <a:schemeClr val="phClr">
-                <a:lumMod val="99000"/>
-                <a:satMod val="120000"/>
-                <a:shade val="78000"/>
-              </a:schemeClr>
-            </a:gs>
-          </a:gsLst>
-          <a:lin ang="5400000" scaled="0"/>
-        </a:gradFill>
-      </a:fillStyleLst>
-      <a:lnStyleLst>
-        <a:ln w="12700" cap="flat" cmpd="sng" algn="ctr">
-          <a:solidFill>
-            <a:schemeClr val="phClr"/>
-          </a:solidFill>
-          <a:prstDash val="solid"/>
-          <a:miter lim="800000"/>
-        </a:ln>
-        <a:ln w="19050" cap="flat" cmpd="sng" algn="ctr">
-          <a:solidFill>
-            <a:schemeClr val="phClr"/>
-          </a:solidFill>
-          <a:prstDash val="solid"/>
-          <a:miter lim="800000"/>
-        </a:ln>
-        <a:ln w="25400" cap="flat" cmpd="sng" algn="ctr">
-          <a:solidFill>
-            <a:schemeClr val="phClr"/>
-          </a:solidFill>
-          <a:prstDash val="solid"/>
-          <a:miter lim="800000"/>
-        </a:ln>
-      </a:lnStyleLst>
-      <a:effectStyleLst>
-        <a:effectStyle>
-          <a:effectLst/>
-        </a:effectStyle>
-        <a:effectStyle>
-          <a:effectLst/>
-        </a:effectStyle>
-        <a:effectStyle>
-          <a:effectLst>
-            <a:outerShdw blurRad="57150" dist="19050" dir="5400000" algn="ctr" rotWithShape="0">
-              <a:srgbClr val="000000">
-                <a:alpha val="63000"/>
-              </a:srgbClr>
-            </a:outerShdw>
-          </a:effectLst>
-        </a:effectStyle>
-      </a:effectStyleLst>
-      <a:bgFillStyleLst>
-        <a:solidFill>
-          <a:schemeClr val="phClr"/>
-        </a:solidFill>
-        <a:solidFill>
-          <a:schemeClr val="phClr">
-            <a:tint val="95000"/>
-            <a:satMod val="170000"/>
-          </a:schemeClr>
-        </a:solidFill>
-        <a:gradFill rotWithShape="1">
-          <a:gsLst>
-            <a:gs pos="0">
-              <a:schemeClr val="phClr">
-                <a:tint val="93000"/>
-                <a:satMod val="150000"/>
-                <a:shade val="98000"/>
-                <a:lumMod val="102000"/>
-              </a:schemeClr>
-            </a:gs>
-            <a:gs pos="50000">
-              <a:schemeClr val="phClr">
-                <a:tint val="98000"/>
-                <a:satMod val="130000"/>
-                <a:shade val="90000"/>
-                <a:lumMod val="103000"/>
-              </a:schemeClr>
-            </a:gs>
-            <a:gs pos="100000">
-              <a:schemeClr val="phClr">
-                <a:shade val="63000"/>
-                <a:satMod val="120000"/>
-              </a:schemeClr>
-            </a:gs>
-          </a:gsLst>
-          <a:lin ang="5400000" scaled="0"/>
-        </a:gradFill>
-      </a:bgFillStyleLst>
-    </a:fmtScheme>
-  </a:themeElements>
-  <a:objectDefaults>
-    <a:lnDef>
-      <a:spPr/>
-      <a:bodyPr/>
-      <a:lstStyle/>
-      <a:style>
-        <a:lnRef idx="2">
-          <a:schemeClr val="accent1"/>
-        </a:lnRef>
-        <a:fillRef idx="0">
-          <a:schemeClr val="accent1"/>
-        </a:fillRef>
-        <a:effectRef idx="1">
-          <a:schemeClr val="accent1"/>
-        </a:effectRef>
-        <a:fontRef idx="minor">
-          <a:schemeClr val="tx1"/>
-        </a:fontRef>
-      </a:style>
-    </a:lnDef>
-  </a:objectDefaults>
-  <a:extraClrSchemeLst/>
-  <a:extLst>
-    <a:ext uri="{05A4C25C-085E-4340-85A3-A5531E510DB2}">
-      <thm15:themeFamily xmlns:thm15="http://schemas.microsoft.com/office/thememl/2012/main" name="Office Theme" id="{2E142A2C-CD16-42D6-873A-C26D2A0506FA}" vid="{1BDDFF52-6CD6-40A5-AB3C-68EB2F1E4D0A}"/>
-    </a:ext>
-  </a:extLst>
-</a:theme>
 </file>